--- a/decks/hist-civil-rights/hist-civil-rights_ch4_king.pptx
+++ b/decks/hist-civil-rights/hist-civil-rights_ch4_king.pptx
@@ -129,31 +129,31 @@
   <p:extLst>
     <p:ext uri="{521415D9-36F7-43E2-AB2F-B90AF26B5E84}">
       <p14:sectionLst xmlns:p14="http://schemas.microsoft.com/office/powerpoint/2010/main">
-        <p14:section name="Opening" id="{1a878423-074b-6fbd-28ae-f60b5e921585}">
+        <p14:section name="Opening" id="{a859fe40-6a72-47e2-3abf-9464f034699f}">
           <p14:sldIdLst>
             <p14:sldId id="256"/>
           </p14:sldIdLst>
         </p14:section>
-        <p14:section name="Gate" id="{9854e2a5-96aa-4f46-245a-55ba1084524a}">
+        <p14:section name="Gate" id="{9d222d87-d359-0faf-1560-eb29918be1e0}">
           <p14:sldIdLst>
             <p14:sldId id="257"/>
             <p14:sldId id="258"/>
             <p14:sldId id="259"/>
           </p14:sldIdLst>
         </p14:section>
-        <p14:section name="Pre-teach" id="{22e2dddf-b698-1b0f-a026-af43cb9b54b8}">
+        <p14:section name="Pre-teach" id="{05834b71-dd68-79ea-e85b-e74c2c7c3dbd}">
           <p14:sldIdLst>
             <p14:sldId id="260"/>
             <p14:sldId id="261"/>
           </p14:sldIdLst>
         </p14:section>
-        <p14:section name="Read-along" id="{a643c9d6-106f-cf9d-47e8-7deda0e9971e}">
+        <p14:section name="Read-along" id="{e705ff83-fd24-d571-0d68-b4496d2fa10b}">
           <p14:sldIdLst>
             <p14:sldId id="262"/>
             <p14:sldId id="263"/>
           </p14:sldIdLst>
         </p14:section>
-        <p14:section name="Teach" id="{69385bef-2c11-fcb3-e6a9-72f022d540d0}">
+        <p14:section name="Teach" id="{cbeda9d9-9b8c-b692-f7b2-94b017e95b6a}">
           <p14:sldIdLst>
             <p14:sldId id="264"/>
             <p14:sldId id="265"/>
@@ -162,7 +162,7 @@
             <p14:sldId id="268"/>
           </p14:sldIdLst>
         </p14:section>
-        <p14:section name="Routes" id="{07a73f5a-4214-526b-da49-b57a9655b074}">
+        <p14:section name="Routes" id="{98ea2c8a-c5f2-a149-94d7-78a26699e9a1}">
           <p14:sldIdLst>
             <p14:sldId id="269"/>
             <p14:sldId id="270"/>
@@ -171,12 +171,12 @@
             <p14:sldId id="273"/>
           </p14:sldIdLst>
         </p14:section>
-        <p14:section name="Close" id="{4fb526df-6c30-4e98-9bd3-5ab5bfb1f94c}">
+        <p14:section name="Close" id="{a80f5398-7667-81bf-1541-b8439e8cebd6}">
           <p14:sldIdLst>
             <p14:sldId id="274"/>
           </p14:sldIdLst>
         </p14:section>
-        <p14:section name="Answers" id="{290095dc-c16d-1700-8450-d830d24a96d0}">
+        <p14:section name="Answers" id="{d0a992cb-5741-0bf7-fa5c-7ca6868eec42}">
           <p14:sldIdLst>
             <p14:sldId id="275"/>
             <p14:sldId id="276"/>
@@ -958,7 +958,7 @@
             <a:r>
               <a:rPr lang="en-US" dirty="0"/>
               <a:t>Teach — The March on Washington, 1963, and the Civil Rights Act, 1964. Say it in your own words, then check understanding with a quick question: ask a pupil from the pre-teach group first, since they met these words and ideas before the lesson. Pupils try to recall before you re-explain.
-On 28 August 1963, King led 250,000 people on the March on Washington for Jobs and Freedom. Washington is the capital of the United States: it is where Congress sits and where the President lives, so a march there is aimed at the people who can change federal law. He made his most famous speech at that march. It too is in copyright and is not quoted here, but its argument is well known: that the promises of equality written into America's founding documents had not been kept for Black Americans, and that the country should keep them, judging people by their character rather than their race.
+On 28 August 1963, King led a crowd of 250,000 to the March on Washington for Jobs and Freedom. The United States has its capital at Washington: Congress sits there and the President lives there, so a march in that city is aimed at the people who can change federal law. He made his most famous speech at that march. It too is in copyright and is not quoted here, but its argument is well known: that the promises of equality written into America's founding documents had not been kept for Black Americans, and that the country should keep them, judging people by their character rather than their race.
 Your lesson asks why King chose Washington rather than the Deep South, where the segregation and the racial violence were. The answer is in the chapter above: he had already proved his case locally, and local wins could not reach every state. Only Congress could.
 In 1964 Congress passed the Civil Rights Act into law. The Act gave Black Americans equal status with white Americans under the law, and made discrimination, including segregation, illegal. It was one of the biggest achievements of the whole campaign, and King's speech is credited with pushing Congress into passing it. But the fight was not over, because Jim Crow rules in the South still kept many Black citizens from voting, and that is where chapter five begins.
 Tip: The Civil Rights Act of 1964 made discrimination illegal. It did not give anyone the vote. Keeping those two laws apart is the single most useful thing you can do in this topic.</a:t>
@@ -6821,7 +6821,7 @@
                 <a:ea typeface="Calibri" pitchFamily="34" charset="-122"/>
                 <a:cs typeface="Calibri" pitchFamily="34" charset="-120"/>
               </a:rPr>
-              <a:t>On 28 August 1963, King led 250,000 people on the March on Washington for Jobs and Freedom.</a:t>
+              <a:t>On 28 August 1963, King led a crowd of 250,000 to the March on Washington for Jobs and Freedom.</a:t>
             </a:r>
             <a:endParaRPr lang="en-US" sz="2400" dirty="0"/>
           </a:p>
